--- a/week-01/presentations/ppts/day-04-identifying-pain-points.pptx
+++ b/week-01/presentations/ppts/day-04-identifying-pain-points.pptx
@@ -5754,79 +5754,7 @@
             </a:pPr>
             <a:r>
               <a:rPr/>
-              <a:t>Sev ↓ / Freq →</a:t>
-            </a:r>
-          </a:p>
-          <a:p>
-            <a:pPr lvl="0" indent="0" marL="0">
-              <a:buNone/>
-            </a:pPr>
-            <a:r>
-              <a:rPr/>
-              <a:t>Low</a:t>
-            </a:r>
-          </a:p>
-          <a:p>
-            <a:pPr lvl="0" indent="0" marL="0">
-              <a:buNone/>
-            </a:pPr>
-            <a:r>
-              <a:rPr/>
-              <a:t>High</a:t>
-            </a:r>
-          </a:p>
-          <a:p>
-            <a:pPr lvl="0" indent="0" marL="0">
-              <a:buNone/>
-            </a:pPr>
-            <a:r>
-              <a:rPr/>
-              <a:t>High</a:t>
-            </a:r>
-          </a:p>
-          <a:p>
-            <a:pPr lvl="0" indent="0" marL="0">
-              <a:buNone/>
-            </a:pPr>
-            <a:r>
-              <a:rPr/>
-              <a:t>Monitor</a:t>
-            </a:r>
-          </a:p>
-          <a:p>
-            <a:pPr lvl="0" indent="0" marL="0">
-              <a:buNone/>
-            </a:pPr>
-            <a:r>
-              <a:rPr/>
-              <a:t>Must fix</a:t>
-            </a:r>
-          </a:p>
-          <a:p>
-            <a:pPr lvl="0" indent="0" marL="0">
-              <a:buNone/>
-            </a:pPr>
-            <a:r>
-              <a:rPr/>
-              <a:t>Low</a:t>
-            </a:r>
-          </a:p>
-          <a:p>
-            <a:pPr lvl="0" indent="0" marL="0">
-              <a:buNone/>
-            </a:pPr>
-            <a:r>
-              <a:rPr/>
-              <a:t>Accept</a:t>
-            </a:r>
-          </a:p>
-          <a:p>
-            <a:pPr lvl="0" indent="0" marL="0">
-              <a:buNone/>
-            </a:pPr>
-            <a:r>
-              <a:rPr/>
-              <a:t>Automate / polish</a:t>
+              <a:t>Sev ↓ / Freq →LowHigh HighMonitorMust fix LowAcceptAutomate / polish</a:t>
             </a:r>
           </a:p>
           <a:p>
@@ -6258,16 +6186,7 @@
             </a:pPr>
             <a:r>
               <a:rPr/>
-              <a:t>After critique: 15 minutes to revise. Each triad readouts its final Top 3 in under 60 seconds.</a:t>
-            </a:r>
-          </a:p>
-          <a:p>
-            <a:pPr lvl="0" indent="0" marL="0">
-              <a:buNone/>
-            </a:pPr>
-            <a:r>
-              <a:rPr/>
-              <a:t>⏱ 20 min per direction · 15 min revise · 10 min readouts</a:t>
+              <a:t>After critique: 15 minutes to revise. Each triad readouts its final Top 3 in under 60 seconds. ⏱ 20 min per direction · 15 min revise · 10 min readouts</a:t>
             </a:r>
           </a:p>
         </p:txBody>

--- a/week-01/presentations/ppts/day-04-identifying-pain-points.pptx
+++ b/week-01/presentations/ppts/day-04-identifying-pain-points.pptx
@@ -7350,7 +7350,7 @@
             </a:pPr>
             <a:r>
               <a:rPr/>
-              <a:t>Your triad receives the FieldPulse Pain Extraction Packet — 8 support tickets, 2 ride-along note pages, 4 interview excerpts, 1 analytics screenshot.</a:t>
+              <a:t>Your triad receives the FieldPulse Pain Extraction Packet — 14 support tickets, 2 ride-along note pages, 4 interview excerpts, 1 analytics screenshot.</a:t>
             </a:r>
           </a:p>
           <a:p>

--- a/week-01/presentations/ppts/day-04-identifying-pain-points.pptx
+++ b/week-01/presentations/ppts/day-04-identifying-pain-points.pptx
@@ -5745,7 +5745,7 @@
             </a:pPr>
             <a:r>
               <a:rPr/>
-              <a:t>Plot each promoted pain in a 3×3 matrix (Severity down × Frequency across), then color-code by addressability.</a:t>
+              <a:t>Plot each promoted pain, then colour by addressability.</a:t>
             </a:r>
           </a:p>
           <a:p>
@@ -5763,16 +5763,16 @@
             </a:pPr>
             <a:r>
               <a:rPr/>
-              <a:t>Addressability colors: green = we can amber = partial red = out of scope</a:t>
-            </a:r>
-          </a:p>
-          <a:p>
-            <a:pPr lvl="0" indent="0" marL="0">
-              <a:buNone/>
-            </a:pPr>
-            <a:r>
-              <a:rPr/>
-              <a:t>A red “Must fix” cell is a communication problem, not a product problem. Those need stakeholder framing, not JIRA tickets.</a:t>
+              <a:t>Addressability: green = we can amber = partial red = out of scope</a:t>
+            </a:r>
+          </a:p>
+          <a:p>
+            <a:pPr lvl="0" indent="0" marL="0">
+              <a:buNone/>
+            </a:pPr>
+            <a:r>
+              <a:rPr/>
+              <a:t>A red “Must fix” cell is a communication problem — stakeholder framing, not JIRA tickets.</a:t>
             </a:r>
           </a:p>
         </p:txBody>

--- a/week-01/presentations/ppts/day-04-identifying-pain-points.pptx
+++ b/week-01/presentations/ppts/day-04-identifying-pain-points.pptx
@@ -5200,6 +5200,27 @@
             <a:r>
               <a:rPr/>
               <a:t>Take a pain. Ask “Why does that happen?” Take the answer, ask “Why?” again. Five levels deep (usually fewer) you hit a root cause that is either systemic or out of scope.</a:t>
+            </a:r>
+          </a:p>
+          <a:p>
+            <a:pPr lvl="0" indent="0">
+              <a:buNone/>
+            </a:pPr>
+            <a:r>
+              <a:rPr>
+                <a:latin typeface="Courier"/>
+              </a:rPr>
+              <a:t>L1: Dispatchers close books 45 min after shift end.
+Why? They reconcile paper tickets from the day.
+L2: They reconcile paper tickets.
+Why? Techs submit paper (not mobile) tickets.
+L3: Techs submit paper.
+Why? The mobile app is slow on 3G in the field.
+L4: Mobile app is slow on 3G.
+Why? Ticket submission downloads all open jobs first.
+L5: (Root cause — addressable) — Ticket submission is not
+designed for intermittent connectivity.
+</a:t>
             </a:r>
           </a:p>
         </p:txBody>

--- a/week-01/presentations/ppts/day-04-identifying-pain-points.pptx
+++ b/week-01/presentations/ppts/day-04-identifying-pain-points.pptx
@@ -626,7 +626,7 @@
             </a:pPr>
             <a:r>
               <a:rPr/>
-              <a:t>If you skip silent-sort, you get a map of the triad’s extrovert. Facilitate this deliberately.</a:t>
+              <a:t>If you skip silent-sort, you get a map of the quad’s extrovert. Facilitate this deliberately.</a:t>
             </a:r>
           </a:p>
         </p:txBody>
@@ -1036,7 +1036,7 @@
             </a:pPr>
             <a:r>
               <a:rPr/>
-              <a:t>Some triads will push back on “must live with it.” Honor the discomfort — it’s accurate.</a:t>
+              <a:t>Some quads will push back on “must live with it.” Honor the discomfort — it’s accurate.</a:t>
             </a:r>
           </a:p>
         </p:txBody>
@@ -1118,7 +1118,7 @@
             </a:pPr>
             <a:r>
               <a:rPr/>
-              <a:t>The Top 3 is Friday’s input — it has to defend itself. Push triads to rank-order, not just list.</a:t>
+              <a:t>The Top 3 is Friday’s input — it has to defend itself. Push quads to rank-order, not just list.</a:t>
             </a:r>
           </a:p>
         </p:txBody>
@@ -1282,7 +1282,7 @@
             </a:pPr>
             <a:r>
               <a:rPr/>
-              <a:t>Facilitator: watch for triads that didn’t change anything. Lack of revision under critique usually means the critique wasn’t heard.</a:t>
+              <a:t>Facilitator: watch for quads that didn’t change anything. Lack of revision under critique usually means the critique wasn’t heard.</a:t>
             </a:r>
           </a:p>
         </p:txBody>
@@ -1938,7 +1938,7 @@
             </a:pPr>
             <a:r>
               <a:rPr/>
-              <a:t>Hand-sort the packet so no triad reads the same subset first. You want diversity when they compare later.</a:t>
+              <a:t>Hand-sort the packet so no quad reads the same subset first. You want diversity when they compare later.</a:t>
             </a:r>
           </a:p>
         </p:txBody>
@@ -5292,7 +5292,7 @@
             </a:pPr>
             <a:r>
               <a:rPr/>
-              <a:t>Silent sort: Each triad member places every pain on the wall (or whiteboard tool). No talking.</a:t>
+              <a:t>Silent sort: Each quad member places every pain on the wall (or whiteboard tool). No talking.</a:t>
             </a:r>
           </a:p>
           <a:p>
@@ -5394,7 +5394,7 @@
             </a:pPr>
             <a:r>
               <a:rPr b="1"/>
-              <a:t>Triads • 50 minutes</a:t>
+              <a:t>Quads • 50 minutes</a:t>
             </a:r>
           </a:p>
           <a:p>
@@ -5868,7 +5868,7 @@
             </a:pPr>
             <a:r>
               <a:rPr b="1"/>
-              <a:t>Triads • 45 minutes</a:t>
+              <a:t>Quads • 45 minutes</a:t>
             </a:r>
           </a:p>
           <a:p>
@@ -6051,7 +6051,7 @@
             </a:pPr>
             <a:r>
               <a:rPr/>
-              <a:t>Each triad picks the three pains that will drive Friday’s problem statement. The selection must defend:</a:t>
+              <a:t>Each quad picks the three pains that will drive Friday’s problem statement. The selection must defend:</a:t>
             </a:r>
           </a:p>
           <a:p>
@@ -6134,7 +6134,7 @@
             </a:pPr>
             <a:r>
               <a:rPr/>
-              <a:t>👥 Activity 4 — Cross-Triad Challenge</a:t>
+              <a:t>👥 Activity 4 — Cross-Quad Challenge</a:t>
             </a:r>
           </a:p>
         </p:txBody>
@@ -6162,16 +6162,16 @@
             </a:pPr>
             <a:r>
               <a:rPr b="1"/>
-              <a:t>Paired triads • 60 minutes • Readouts</a:t>
-            </a:r>
-          </a:p>
-          <a:p>
-            <a:pPr lvl="0" indent="0" marL="0">
-              <a:buNone/>
-            </a:pPr>
-            <a:r>
-              <a:rPr/>
-              <a:t>Each triad presents Top 3 + matrix to another triad. Partners must:</a:t>
+              <a:t>Paired quads • 60 minutes • Readouts</a:t>
+            </a:r>
+          </a:p>
+          <a:p>
+            <a:pPr lvl="0" indent="0" marL="0">
+              <a:buNone/>
+            </a:pPr>
+            <a:r>
+              <a:rPr/>
+              <a:t>Each quad presents Top 3 + matrix to another quad. Partners must:</a:t>
             </a:r>
           </a:p>
           <a:p>
@@ -6207,7 +6207,7 @@
             </a:pPr>
             <a:r>
               <a:rPr/>
-              <a:t>After critique: 15 minutes to revise. Each triad readouts its final Top 3 in under 60 seconds. ⏱ 20 min per direction · 15 min revise · 10 min readouts</a:t>
+              <a:t>After critique: 15 minutes to revise. Each quad readouts its final Top 3 in under 60 seconds. ⏱ 20 min per direction · 15 min revise · 10 min readouts</a:t>
             </a:r>
           </a:p>
         </p:txBody>
@@ -6363,7 +6363,7 @@
             </a:pPr>
             <a:r>
               <a:rPr/>
-              <a:t>A scored pain-point matrix per triad</a:t>
+              <a:t>A scored pain-point matrix per quad</a:t>
             </a:r>
           </a:p>
           <a:p>
@@ -7362,16 +7362,16 @@
             </a:pPr>
             <a:r>
               <a:rPr b="1"/>
-              <a:t>Triads • 45 minutes</a:t>
-            </a:r>
-          </a:p>
-          <a:p>
-            <a:pPr lvl="0" indent="0" marL="0">
-              <a:buNone/>
-            </a:pPr>
-            <a:r>
-              <a:rPr/>
-              <a:t>Your triad receives the FieldPulse Pain Extraction Packet — 14 support tickets, 2 ride-along note pages, 4 interview excerpts, 1 analytics screenshot.</a:t>
+              <a:t>Quads • 45 minutes</a:t>
+            </a:r>
+          </a:p>
+          <a:p>
+            <a:pPr lvl="0" indent="0" marL="0">
+              <a:buNone/>
+            </a:pPr>
+            <a:r>
+              <a:rPr/>
+              <a:t>Your quad receives the FieldPulse Pain Extraction Packet — 14 support tickets, 2 ride-along note pages, 4 interview excerpts, 1 analytics screenshot.</a:t>
             </a:r>
           </a:p>
           <a:p>

--- a/week-01/presentations/ppts/day-04-identifying-pain-points.pptx
+++ b/week-01/presentations/ppts/day-04-identifying-pain-points.pptx
@@ -5868,7 +5868,7 @@
             </a:pPr>
             <a:r>
               <a:rPr b="1"/>
-              <a:t>Quads • 45 minutes</a:t>
+              <a:t>Quads • 50 minutes</a:t>
             </a:r>
           </a:p>
           <a:p>

--- a/week-01/presentations/ppts/day-04-identifying-pain-points.pptx
+++ b/week-01/presentations/ppts/day-04-identifying-pain-points.pptx
@@ -5904,7 +5904,7 @@
             </a:pPr>
             <a:r>
               <a:rPr/>
-              <a:t>⏱ 20 min place · 15 min addressability notes · 10 min AI-leverage</a:t>
+              <a:t>⏱ 25 min place · 15 min addressability notes · 10 min AI-leverage</a:t>
             </a:r>
           </a:p>
         </p:txBody>
